--- a/Theory Class-Notes/Unit-2 Supervised Learning.pptx
+++ b/Theory Class-Notes/Unit-2 Supervised Learning.pptx
@@ -5,7 +5,7 @@
     <p:sldMasterId id="2147483660" r:id="rId1"/>
   </p:sldMasterIdLst>
   <p:notesMasterIdLst>
-    <p:notesMasterId r:id="rId155"/>
+    <p:notesMasterId r:id="rId153"/>
   </p:notesMasterIdLst>
   <p:sldIdLst>
     <p:sldId id="427" r:id="rId2"/>
@@ -159,8 +159,6 @@
     <p:sldId id="925" r:id="rId150"/>
     <p:sldId id="804" r:id="rId151"/>
     <p:sldId id="926" r:id="rId152"/>
-    <p:sldId id="927" r:id="rId153"/>
-    <p:sldId id="928" r:id="rId154"/>
   </p:sldIdLst>
   <p:sldSz cx="12192000" cy="6858000"/>
   <p:notesSz cx="6858000" cy="9144000"/>
@@ -735,7 +733,7 @@
           <a:p>
             <a:fld id="{91881A6C-4E2A-4AAB-91B1-958BE8A270AF}" type="datetimeFigureOut">
               <a:rPr lang="en-IN" smtClean="0"/>
-              <a:t>04-07-2025</a:t>
+              <a:t>07-07-2025</a:t>
             </a:fld>
             <a:endParaRPr lang="en-IN"/>
           </a:p>
@@ -1152,7 +1150,7 @@
           <a:p>
             <a:fld id="{050FF069-687C-4110-9C8F-B52BF36C2535}" type="datetimeFigureOut">
               <a:rPr lang="en-IN" smtClean="0"/>
-              <a:t>04-07-2025</a:t>
+              <a:t>07-07-2025</a:t>
             </a:fld>
             <a:endParaRPr lang="en-IN"/>
           </a:p>
@@ -1350,7 +1348,7 @@
           <a:p>
             <a:fld id="{050FF069-687C-4110-9C8F-B52BF36C2535}" type="datetimeFigureOut">
               <a:rPr lang="en-IN" smtClean="0"/>
-              <a:t>04-07-2025</a:t>
+              <a:t>07-07-2025</a:t>
             </a:fld>
             <a:endParaRPr lang="en-IN"/>
           </a:p>
@@ -1558,7 +1556,7 @@
           <a:p>
             <a:fld id="{050FF069-687C-4110-9C8F-B52BF36C2535}" type="datetimeFigureOut">
               <a:rPr lang="en-IN" smtClean="0"/>
-              <a:t>04-07-2025</a:t>
+              <a:t>07-07-2025</a:t>
             </a:fld>
             <a:endParaRPr lang="en-IN"/>
           </a:p>
@@ -1756,7 +1754,7 @@
           <a:p>
             <a:fld id="{050FF069-687C-4110-9C8F-B52BF36C2535}" type="datetimeFigureOut">
               <a:rPr lang="en-IN" smtClean="0"/>
-              <a:t>04-07-2025</a:t>
+              <a:t>07-07-2025</a:t>
             </a:fld>
             <a:endParaRPr lang="en-IN"/>
           </a:p>
@@ -2032,7 +2030,7 @@
           <a:p>
             <a:fld id="{050FF069-687C-4110-9C8F-B52BF36C2535}" type="datetimeFigureOut">
               <a:rPr lang="en-IN" smtClean="0"/>
-              <a:t>04-07-2025</a:t>
+              <a:t>07-07-2025</a:t>
             </a:fld>
             <a:endParaRPr lang="en-IN"/>
           </a:p>
@@ -2299,7 +2297,7 @@
           <a:p>
             <a:fld id="{050FF069-687C-4110-9C8F-B52BF36C2535}" type="datetimeFigureOut">
               <a:rPr lang="en-IN" smtClean="0"/>
-              <a:t>04-07-2025</a:t>
+              <a:t>07-07-2025</a:t>
             </a:fld>
             <a:endParaRPr lang="en-IN"/>
           </a:p>
@@ -2713,7 +2711,7 @@
           <a:p>
             <a:fld id="{050FF069-687C-4110-9C8F-B52BF36C2535}" type="datetimeFigureOut">
               <a:rPr lang="en-IN" smtClean="0"/>
-              <a:t>04-07-2025</a:t>
+              <a:t>07-07-2025</a:t>
             </a:fld>
             <a:endParaRPr lang="en-IN"/>
           </a:p>
@@ -2860,7 +2858,7 @@
           <a:p>
             <a:fld id="{050FF069-687C-4110-9C8F-B52BF36C2535}" type="datetimeFigureOut">
               <a:rPr lang="en-IN" smtClean="0"/>
-              <a:t>04-07-2025</a:t>
+              <a:t>07-07-2025</a:t>
             </a:fld>
             <a:endParaRPr lang="en-IN"/>
           </a:p>
@@ -2973,7 +2971,7 @@
           <a:p>
             <a:fld id="{050FF069-687C-4110-9C8F-B52BF36C2535}" type="datetimeFigureOut">
               <a:rPr lang="en-IN" smtClean="0"/>
-              <a:t>04-07-2025</a:t>
+              <a:t>07-07-2025</a:t>
             </a:fld>
             <a:endParaRPr lang="en-IN"/>
           </a:p>
@@ -3292,7 +3290,7 @@
           <a:p>
             <a:fld id="{050FF069-687C-4110-9C8F-B52BF36C2535}" type="datetimeFigureOut">
               <a:rPr lang="en-IN" smtClean="0"/>
-              <a:t>04-07-2025</a:t>
+              <a:t>07-07-2025</a:t>
             </a:fld>
             <a:endParaRPr lang="en-IN"/>
           </a:p>
@@ -3587,7 +3585,7 @@
           <a:p>
             <a:fld id="{050FF069-687C-4110-9C8F-B52BF36C2535}" type="datetimeFigureOut">
               <a:rPr lang="en-IN" smtClean="0"/>
-              <a:t>04-07-2025</a:t>
+              <a:t>07-07-2025</a:t>
             </a:fld>
             <a:endParaRPr lang="en-IN"/>
           </a:p>
@@ -4972,7 +4970,7 @@
           <a:p>
             <a:fld id="{050FF069-687C-4110-9C8F-B52BF36C2535}" type="datetimeFigureOut">
               <a:rPr lang="en-IN" smtClean="0"/>
-              <a:t>04-07-2025</a:t>
+              <a:t>07-07-2025</a:t>
             </a:fld>
             <a:endParaRPr lang="en-IN"/>
           </a:p>
@@ -22203,148 +22201,6 @@
 </p:sld>
 </file>
 
-<file path=ppt/slides/slide152.xml><?xml version="1.0" encoding="utf-8"?>
-<p:sld xmlns:a="http://schemas.openxmlformats.org/drawingml/2006/main" xmlns:r="http://schemas.openxmlformats.org/officeDocument/2006/relationships" xmlns:p="http://schemas.openxmlformats.org/presentationml/2006/main">
-  <p:cSld>
-    <p:spTree>
-      <p:nvGrpSpPr>
-        <p:cNvPr id="1" name="">
-          <a:extLst>
-            <a:ext uri="{FF2B5EF4-FFF2-40B4-BE49-F238E27FC236}">
-              <a16:creationId xmlns:a16="http://schemas.microsoft.com/office/drawing/2014/main" id="{89644C7B-35AE-3691-F1C3-858FB04CF6A3}"/>
-            </a:ext>
-          </a:extLst>
-        </p:cNvPr>
-        <p:cNvGrpSpPr/>
-        <p:nvPr/>
-      </p:nvGrpSpPr>
-      <p:grpSpPr>
-        <a:xfrm>
-          <a:off x="0" y="0"/>
-          <a:ext cx="0" cy="0"/>
-          <a:chOff x="0" y="0"/>
-          <a:chExt cx="0" cy="0"/>
-        </a:xfrm>
-      </p:grpSpPr>
-      <p:sp>
-        <p:nvSpPr>
-          <p:cNvPr id="3" name="Content Placeholder 2">
-            <a:extLst>
-              <a:ext uri="{FF2B5EF4-FFF2-40B4-BE49-F238E27FC236}">
-                <a16:creationId xmlns:a16="http://schemas.microsoft.com/office/drawing/2014/main" id="{D380DE91-B2E3-8C27-3789-FE2543B3B625}"/>
-              </a:ext>
-            </a:extLst>
-          </p:cNvPr>
-          <p:cNvSpPr>
-            <a:spLocks noGrp="1"/>
-          </p:cNvSpPr>
-          <p:nvPr>
-            <p:ph idx="1"/>
-          </p:nvPr>
-        </p:nvSpPr>
-        <p:spPr>
-          <a:xfrm>
-            <a:off x="702853" y="620486"/>
-            <a:ext cx="10900568" cy="5529943"/>
-          </a:xfrm>
-        </p:spPr>
-        <p:txBody>
-          <a:bodyPr>
-            <a:normAutofit/>
-          </a:bodyPr>
-          <a:lstStyle/>
-          <a:p>
-            <a:pPr marL="0" indent="0">
-              <a:buNone/>
-            </a:pPr>
-            <a:endParaRPr lang="en-IN" sz="2400" dirty="0"/>
-          </a:p>
-        </p:txBody>
-      </p:sp>
-    </p:spTree>
-    <p:extLst>
-      <p:ext uri="{BB962C8B-B14F-4D97-AF65-F5344CB8AC3E}">
-        <p14:creationId xmlns:p14="http://schemas.microsoft.com/office/powerpoint/2010/main" val="2439488123"/>
-      </p:ext>
-    </p:extLst>
-  </p:cSld>
-  <p:clrMapOvr>
-    <a:masterClrMapping/>
-  </p:clrMapOvr>
-</p:sld>
-</file>
-
-<file path=ppt/slides/slide153.xml><?xml version="1.0" encoding="utf-8"?>
-<p:sld xmlns:a="http://schemas.openxmlformats.org/drawingml/2006/main" xmlns:r="http://schemas.openxmlformats.org/officeDocument/2006/relationships" xmlns:p="http://schemas.openxmlformats.org/presentationml/2006/main">
-  <p:cSld>
-    <p:spTree>
-      <p:nvGrpSpPr>
-        <p:cNvPr id="1" name="">
-          <a:extLst>
-            <a:ext uri="{FF2B5EF4-FFF2-40B4-BE49-F238E27FC236}">
-              <a16:creationId xmlns:a16="http://schemas.microsoft.com/office/drawing/2014/main" id="{87DD48FC-2FEE-0D31-1ADF-579F1B890AB2}"/>
-            </a:ext>
-          </a:extLst>
-        </p:cNvPr>
-        <p:cNvGrpSpPr/>
-        <p:nvPr/>
-      </p:nvGrpSpPr>
-      <p:grpSpPr>
-        <a:xfrm>
-          <a:off x="0" y="0"/>
-          <a:ext cx="0" cy="0"/>
-          <a:chOff x="0" y="0"/>
-          <a:chExt cx="0" cy="0"/>
-        </a:xfrm>
-      </p:grpSpPr>
-      <p:sp>
-        <p:nvSpPr>
-          <p:cNvPr id="3" name="Content Placeholder 2">
-            <a:extLst>
-              <a:ext uri="{FF2B5EF4-FFF2-40B4-BE49-F238E27FC236}">
-                <a16:creationId xmlns:a16="http://schemas.microsoft.com/office/drawing/2014/main" id="{0C329CC4-388E-42CC-EAD9-49764F7B10BC}"/>
-              </a:ext>
-            </a:extLst>
-          </p:cNvPr>
-          <p:cNvSpPr>
-            <a:spLocks noGrp="1"/>
-          </p:cNvSpPr>
-          <p:nvPr>
-            <p:ph idx="1"/>
-          </p:nvPr>
-        </p:nvSpPr>
-        <p:spPr>
-          <a:xfrm>
-            <a:off x="702853" y="620486"/>
-            <a:ext cx="10900568" cy="5529943"/>
-          </a:xfrm>
-        </p:spPr>
-        <p:txBody>
-          <a:bodyPr>
-            <a:normAutofit/>
-          </a:bodyPr>
-          <a:lstStyle/>
-          <a:p>
-            <a:pPr marL="0" indent="0">
-              <a:buNone/>
-            </a:pPr>
-            <a:endParaRPr lang="en-IN" sz="2400" dirty="0"/>
-          </a:p>
-        </p:txBody>
-      </p:sp>
-    </p:spTree>
-    <p:extLst>
-      <p:ext uri="{BB962C8B-B14F-4D97-AF65-F5344CB8AC3E}">
-        <p14:creationId xmlns:p14="http://schemas.microsoft.com/office/powerpoint/2010/main" val="2076683156"/>
-      </p:ext>
-    </p:extLst>
-  </p:cSld>
-  <p:clrMapOvr>
-    <a:masterClrMapping/>
-  </p:clrMapOvr>
-</p:sld>
-</file>
-
 <file path=ppt/slides/slide16.xml><?xml version="1.0" encoding="utf-8"?>
 <p:sld xmlns:a="http://schemas.openxmlformats.org/drawingml/2006/main" xmlns:r="http://schemas.openxmlformats.org/officeDocument/2006/relationships" xmlns:p="http://schemas.openxmlformats.org/presentationml/2006/main">
   <p:cSld>

--- a/Theory Class-Notes/Unit-2 Supervised Learning.pptx
+++ b/Theory Class-Notes/Unit-2 Supervised Learning.pptx
@@ -5,7 +5,7 @@
     <p:sldMasterId id="2147483660" r:id="rId1"/>
   </p:sldMasterIdLst>
   <p:notesMasterIdLst>
-    <p:notesMasterId r:id="rId153"/>
+    <p:notesMasterId r:id="rId154"/>
   </p:notesMasterIdLst>
   <p:sldIdLst>
     <p:sldId id="427" r:id="rId2"/>
@@ -144,21 +144,22 @@
     <p:sldId id="909" r:id="rId135"/>
     <p:sldId id="910" r:id="rId136"/>
     <p:sldId id="911" r:id="rId137"/>
-    <p:sldId id="912" r:id="rId138"/>
-    <p:sldId id="914" r:id="rId139"/>
-    <p:sldId id="915" r:id="rId140"/>
-    <p:sldId id="916" r:id="rId141"/>
-    <p:sldId id="917" r:id="rId142"/>
-    <p:sldId id="918" r:id="rId143"/>
-    <p:sldId id="919" r:id="rId144"/>
-    <p:sldId id="920" r:id="rId145"/>
-    <p:sldId id="921" r:id="rId146"/>
-    <p:sldId id="922" r:id="rId147"/>
-    <p:sldId id="923" r:id="rId148"/>
-    <p:sldId id="924" r:id="rId149"/>
-    <p:sldId id="925" r:id="rId150"/>
-    <p:sldId id="804" r:id="rId151"/>
-    <p:sldId id="926" r:id="rId152"/>
+    <p:sldId id="472" r:id="rId138"/>
+    <p:sldId id="912" r:id="rId139"/>
+    <p:sldId id="914" r:id="rId140"/>
+    <p:sldId id="915" r:id="rId141"/>
+    <p:sldId id="916" r:id="rId142"/>
+    <p:sldId id="917" r:id="rId143"/>
+    <p:sldId id="918" r:id="rId144"/>
+    <p:sldId id="919" r:id="rId145"/>
+    <p:sldId id="920" r:id="rId146"/>
+    <p:sldId id="921" r:id="rId147"/>
+    <p:sldId id="922" r:id="rId148"/>
+    <p:sldId id="923" r:id="rId149"/>
+    <p:sldId id="924" r:id="rId150"/>
+    <p:sldId id="925" r:id="rId151"/>
+    <p:sldId id="804" r:id="rId152"/>
+    <p:sldId id="926" r:id="rId153"/>
   </p:sldIdLst>
   <p:sldSz cx="12192000" cy="6858000"/>
   <p:notesSz cx="6858000" cy="9144000"/>
@@ -268,13 +269,29 @@
 <file path=ppt/revisionInfo.xml><?xml version="1.0" encoding="utf-8"?>
 <p1510:revInfo xmlns:a="http://schemas.openxmlformats.org/drawingml/2006/main" xmlns:r="http://schemas.openxmlformats.org/officeDocument/2006/relationships" xmlns:p1510="http://schemas.microsoft.com/office/powerpoint/2015/10/main">
   <p1510:revLst>
-    <p1510:client id="{60DAB3FE-36F0-400F-A6EB-B1DC9163ED65}" v="39" dt="2025-06-30T04:39:32.872"/>
+    <p1510:client id="{AB5EAA38-A801-404F-9903-167B010D9E32}" v="1" dt="2025-07-26T15:02:18.795"/>
   </p1510:revLst>
 </p1510:revInfo>
 </file>
 
 <file path=ppt/changesInfos/changesInfo1.xml><?xml version="1.0" encoding="utf-8"?>
 <pc:chgInfo xmlns:a="http://schemas.openxmlformats.org/drawingml/2006/main" xmlns:r="http://schemas.openxmlformats.org/officeDocument/2006/relationships" xmlns:ac="http://schemas.microsoft.com/office/drawing/2013/main/command" xmlns:pc="http://schemas.microsoft.com/office/powerpoint/2013/main/command">
+  <pc:docChgLst>
+    <pc:chgData name="Pramod Naik" userId="ceb6df04-ef15-4d9b-a141-998a03559d75" providerId="ADAL" clId="{AB5EAA38-A801-404F-9903-167B010D9E32}"/>
+    <pc:docChg chg="addSld modSld">
+      <pc:chgData name="Pramod Naik" userId="ceb6df04-ef15-4d9b-a141-998a03559d75" providerId="ADAL" clId="{AB5EAA38-A801-404F-9903-167B010D9E32}" dt="2025-07-26T15:02:18.791" v="0"/>
+      <pc:docMkLst>
+        <pc:docMk/>
+      </pc:docMkLst>
+      <pc:sldChg chg="add">
+        <pc:chgData name="Pramod Naik" userId="ceb6df04-ef15-4d9b-a141-998a03559d75" providerId="ADAL" clId="{AB5EAA38-A801-404F-9903-167B010D9E32}" dt="2025-07-26T15:02:18.791" v="0"/>
+        <pc:sldMkLst>
+          <pc:docMk/>
+          <pc:sldMk cId="425432386" sldId="472"/>
+        </pc:sldMkLst>
+      </pc:sldChg>
+    </pc:docChg>
+  </pc:docChgLst>
   <pc:docChgLst>
     <pc:chgData name="Pramod Naik" userId="ceb6df04-ef15-4d9b-a141-998a03559d75" providerId="ADAL" clId="{60DAB3FE-36F0-400F-A6EB-B1DC9163ED65}"/>
     <pc:docChg chg="undo custSel addSld modSld sldOrd">
@@ -733,7 +750,7 @@
           <a:p>
             <a:fld id="{91881A6C-4E2A-4AAB-91B1-958BE8A270AF}" type="datetimeFigureOut">
               <a:rPr lang="en-IN" smtClean="0"/>
-              <a:t>07-07-2025</a:t>
+              <a:t>26-07-2025</a:t>
             </a:fld>
             <a:endParaRPr lang="en-IN"/>
           </a:p>
@@ -1150,7 +1167,7 @@
           <a:p>
             <a:fld id="{050FF069-687C-4110-9C8F-B52BF36C2535}" type="datetimeFigureOut">
               <a:rPr lang="en-IN" smtClean="0"/>
-              <a:t>07-07-2025</a:t>
+              <a:t>26-07-2025</a:t>
             </a:fld>
             <a:endParaRPr lang="en-IN"/>
           </a:p>
@@ -1348,7 +1365,7 @@
           <a:p>
             <a:fld id="{050FF069-687C-4110-9C8F-B52BF36C2535}" type="datetimeFigureOut">
               <a:rPr lang="en-IN" smtClean="0"/>
-              <a:t>07-07-2025</a:t>
+              <a:t>26-07-2025</a:t>
             </a:fld>
             <a:endParaRPr lang="en-IN"/>
           </a:p>
@@ -1556,7 +1573,7 @@
           <a:p>
             <a:fld id="{050FF069-687C-4110-9C8F-B52BF36C2535}" type="datetimeFigureOut">
               <a:rPr lang="en-IN" smtClean="0"/>
-              <a:t>07-07-2025</a:t>
+              <a:t>26-07-2025</a:t>
             </a:fld>
             <a:endParaRPr lang="en-IN"/>
           </a:p>
@@ -1754,7 +1771,7 @@
           <a:p>
             <a:fld id="{050FF069-687C-4110-9C8F-B52BF36C2535}" type="datetimeFigureOut">
               <a:rPr lang="en-IN" smtClean="0"/>
-              <a:t>07-07-2025</a:t>
+              <a:t>26-07-2025</a:t>
             </a:fld>
             <a:endParaRPr lang="en-IN"/>
           </a:p>
@@ -2030,7 +2047,7 @@
           <a:p>
             <a:fld id="{050FF069-687C-4110-9C8F-B52BF36C2535}" type="datetimeFigureOut">
               <a:rPr lang="en-IN" smtClean="0"/>
-              <a:t>07-07-2025</a:t>
+              <a:t>26-07-2025</a:t>
             </a:fld>
             <a:endParaRPr lang="en-IN"/>
           </a:p>
@@ -2297,7 +2314,7 @@
           <a:p>
             <a:fld id="{050FF069-687C-4110-9C8F-B52BF36C2535}" type="datetimeFigureOut">
               <a:rPr lang="en-IN" smtClean="0"/>
-              <a:t>07-07-2025</a:t>
+              <a:t>26-07-2025</a:t>
             </a:fld>
             <a:endParaRPr lang="en-IN"/>
           </a:p>
@@ -2711,7 +2728,7 @@
           <a:p>
             <a:fld id="{050FF069-687C-4110-9C8F-B52BF36C2535}" type="datetimeFigureOut">
               <a:rPr lang="en-IN" smtClean="0"/>
-              <a:t>07-07-2025</a:t>
+              <a:t>26-07-2025</a:t>
             </a:fld>
             <a:endParaRPr lang="en-IN"/>
           </a:p>
@@ -2858,7 +2875,7 @@
           <a:p>
             <a:fld id="{050FF069-687C-4110-9C8F-B52BF36C2535}" type="datetimeFigureOut">
               <a:rPr lang="en-IN" smtClean="0"/>
-              <a:t>07-07-2025</a:t>
+              <a:t>26-07-2025</a:t>
             </a:fld>
             <a:endParaRPr lang="en-IN"/>
           </a:p>
@@ -2971,7 +2988,7 @@
           <a:p>
             <a:fld id="{050FF069-687C-4110-9C8F-B52BF36C2535}" type="datetimeFigureOut">
               <a:rPr lang="en-IN" smtClean="0"/>
-              <a:t>07-07-2025</a:t>
+              <a:t>26-07-2025</a:t>
             </a:fld>
             <a:endParaRPr lang="en-IN"/>
           </a:p>
@@ -3290,7 +3307,7 @@
           <a:p>
             <a:fld id="{050FF069-687C-4110-9C8F-B52BF36C2535}" type="datetimeFigureOut">
               <a:rPr lang="en-IN" smtClean="0"/>
-              <a:t>07-07-2025</a:t>
+              <a:t>26-07-2025</a:t>
             </a:fld>
             <a:endParaRPr lang="en-IN"/>
           </a:p>
@@ -3585,7 +3602,7 @@
           <a:p>
             <a:fld id="{050FF069-687C-4110-9C8F-B52BF36C2535}" type="datetimeFigureOut">
               <a:rPr lang="en-IN" smtClean="0"/>
-              <a:t>07-07-2025</a:t>
+              <a:t>26-07-2025</a:t>
             </a:fld>
             <a:endParaRPr lang="en-IN"/>
           </a:p>
@@ -4970,7 +4987,7 @@
           <a:p>
             <a:fld id="{050FF069-687C-4110-9C8F-B52BF36C2535}" type="datetimeFigureOut">
               <a:rPr lang="en-IN" smtClean="0"/>
-              <a:t>07-07-2025</a:t>
+              <a:t>26-07-2025</a:t>
             </a:fld>
             <a:endParaRPr lang="en-IN"/>
           </a:p>
@@ -18593,6 +18610,190 @@
         <p:cNvPr id="1" name="">
           <a:extLst>
             <a:ext uri="{FF2B5EF4-FFF2-40B4-BE49-F238E27FC236}">
+              <a16:creationId xmlns:a16="http://schemas.microsoft.com/office/drawing/2014/main" id="{DDF6FDD2-69F4-7F17-BFB9-E618C05DAA23}"/>
+            </a:ext>
+          </a:extLst>
+        </p:cNvPr>
+        <p:cNvGrpSpPr/>
+        <p:nvPr/>
+      </p:nvGrpSpPr>
+      <p:grpSpPr>
+        <a:xfrm>
+          <a:off x="0" y="0"/>
+          <a:ext cx="0" cy="0"/>
+          <a:chOff x="0" y="0"/>
+          <a:chExt cx="0" cy="0"/>
+        </a:xfrm>
+      </p:grpSpPr>
+      <p:sp>
+        <p:nvSpPr>
+          <p:cNvPr id="3" name="Content Placeholder 2">
+            <a:extLst>
+              <a:ext uri="{FF2B5EF4-FFF2-40B4-BE49-F238E27FC236}">
+                <a16:creationId xmlns:a16="http://schemas.microsoft.com/office/drawing/2014/main" id="{31DF38D9-4E54-8F08-952F-D3D73D9A9C91}"/>
+              </a:ext>
+            </a:extLst>
+          </p:cNvPr>
+          <p:cNvSpPr>
+            <a:spLocks noGrp="1"/>
+          </p:cNvSpPr>
+          <p:nvPr>
+            <p:ph idx="1"/>
+          </p:nvPr>
+        </p:nvSpPr>
+        <p:spPr>
+          <a:xfrm>
+            <a:off x="777240" y="707571"/>
+            <a:ext cx="10659110" cy="5469392"/>
+          </a:xfrm>
+        </p:spPr>
+        <p:txBody>
+          <a:bodyPr>
+            <a:normAutofit lnSpcReduction="10000"/>
+          </a:bodyPr>
+          <a:lstStyle/>
+          <a:p>
+            <a:pPr marL="0" indent="0">
+              <a:buNone/>
+            </a:pPr>
+            <a:r>
+              <a:rPr lang="en-US" sz="2800" b="1" dirty="0"/>
+              <a:t>Tuning or Hyperparameter Tuning:</a:t>
+            </a:r>
+          </a:p>
+          <a:p>
+            <a:pPr marL="0" indent="0">
+              <a:buNone/>
+            </a:pPr>
+            <a:r>
+              <a:rPr lang="en-US" sz="2400" b="1" dirty="0"/>
+              <a:t>Tuning</a:t>
+            </a:r>
+            <a:r>
+              <a:rPr lang="en-US" sz="2400" dirty="0"/>
+              <a:t> also called </a:t>
+            </a:r>
+            <a:r>
+              <a:rPr lang="en-US" sz="2400" b="1" dirty="0"/>
+              <a:t>Hyperparameter Tuning </a:t>
+            </a:r>
+            <a:r>
+              <a:rPr lang="en-US" sz="2400" dirty="0"/>
+              <a:t>is the process of </a:t>
+            </a:r>
+            <a:r>
+              <a:rPr lang="en-US" sz="2400" b="1" dirty="0">
+                <a:solidFill>
+                  <a:srgbClr val="C00000"/>
+                </a:solidFill>
+              </a:rPr>
+              <a:t>finding the best combination of model settings </a:t>
+            </a:r>
+            <a:r>
+              <a:rPr lang="en-US" sz="2400" dirty="0"/>
+              <a:t>(called hyperparameters) that result in the best performance of a machine learning model.</a:t>
+            </a:r>
+          </a:p>
+          <a:p>
+            <a:pPr marL="0" indent="0">
+              <a:buNone/>
+            </a:pPr>
+            <a:endParaRPr lang="en-US" sz="1200" dirty="0"/>
+          </a:p>
+          <a:p>
+            <a:pPr marL="0" indent="0">
+              <a:buNone/>
+            </a:pPr>
+            <a:r>
+              <a:rPr lang="en-US" sz="2400" b="1" dirty="0"/>
+              <a:t>In Simple Words:</a:t>
+            </a:r>
+          </a:p>
+          <a:p>
+            <a:pPr marL="0" indent="0">
+              <a:buNone/>
+            </a:pPr>
+            <a:r>
+              <a:rPr lang="en-US" sz="2400" dirty="0"/>
+              <a:t>Just like </a:t>
+            </a:r>
+            <a:r>
+              <a:rPr lang="en-US" sz="2400" b="1" dirty="0"/>
+              <a:t>adjusting the settings on a car </a:t>
+            </a:r>
+            <a:r>
+              <a:rPr lang="en-US" sz="2400" dirty="0"/>
+              <a:t>(like tire pressure or suspension) for better performance, tuning adjusts the model settings to get the best results on your data.</a:t>
+            </a:r>
+          </a:p>
+          <a:p>
+            <a:pPr marL="0" indent="0">
+              <a:buNone/>
+            </a:pPr>
+            <a:endParaRPr lang="en-US" sz="1100" b="1" dirty="0"/>
+          </a:p>
+          <a:p>
+            <a:pPr marL="0" indent="0">
+              <a:buNone/>
+            </a:pPr>
+            <a:r>
+              <a:rPr lang="en-US" sz="2400" b="1" dirty="0"/>
+              <a:t>Why Do We Need Tuning?</a:t>
+            </a:r>
+          </a:p>
+          <a:p>
+            <a:r>
+              <a:rPr lang="en-US" sz="2400" dirty="0"/>
+              <a:t>Most machine learning models, like SVM, Random Forest, or Neural Networks, have hyperparameters that you must set before training.</a:t>
+            </a:r>
+          </a:p>
+          <a:p>
+            <a:r>
+              <a:rPr lang="en-US" sz="2400" dirty="0"/>
+              <a:t>These settings affect how the model learns from the data.</a:t>
+            </a:r>
+          </a:p>
+          <a:p>
+            <a:r>
+              <a:rPr lang="en-US" sz="2400" dirty="0"/>
+              <a:t>Tuning helps find the values that give highest accuracy or lowest error on validation data.</a:t>
+            </a:r>
+          </a:p>
+          <a:p>
+            <a:pPr marL="0" indent="0">
+              <a:buNone/>
+            </a:pPr>
+            <a:endParaRPr lang="en-US" sz="2400" dirty="0"/>
+          </a:p>
+          <a:p>
+            <a:pPr marL="0" indent="0">
+              <a:buNone/>
+            </a:pPr>
+            <a:endParaRPr lang="en-IN" sz="2400" dirty="0"/>
+          </a:p>
+        </p:txBody>
+      </p:sp>
+    </p:spTree>
+    <p:extLst>
+      <p:ext uri="{BB962C8B-B14F-4D97-AF65-F5344CB8AC3E}">
+        <p14:creationId xmlns:p14="http://schemas.microsoft.com/office/powerpoint/2010/main" val="425432386"/>
+      </p:ext>
+    </p:extLst>
+  </p:cSld>
+  <p:clrMapOvr>
+    <a:masterClrMapping/>
+  </p:clrMapOvr>
+</p:sld>
+</file>
+
+<file path=ppt/slides/slide138.xml><?xml version="1.0" encoding="utf-8"?>
+<p:sld xmlns:a="http://schemas.openxmlformats.org/drawingml/2006/main" xmlns:r="http://schemas.openxmlformats.org/officeDocument/2006/relationships" xmlns:p="http://schemas.openxmlformats.org/presentationml/2006/main">
+  <p:cSld>
+    <p:spTree>
+      <p:nvGrpSpPr>
+        <p:cNvPr id="1" name="">
+          <a:extLst>
+            <a:ext uri="{FF2B5EF4-FFF2-40B4-BE49-F238E27FC236}">
               <a16:creationId xmlns:a16="http://schemas.microsoft.com/office/drawing/2014/main" id="{519123AB-52BA-95F2-B776-9FE8F444A40E}"/>
             </a:ext>
           </a:extLst>
@@ -18820,7 +19021,7 @@
 </p:sld>
 </file>
 
-<file path=ppt/slides/slide138.xml><?xml version="1.0" encoding="utf-8"?>
+<file path=ppt/slides/slide139.xml><?xml version="1.0" encoding="utf-8"?>
 <p:sld xmlns:a="http://schemas.openxmlformats.org/drawingml/2006/main" xmlns:r="http://schemas.openxmlformats.org/officeDocument/2006/relationships" xmlns:p="http://schemas.openxmlformats.org/presentationml/2006/main">
   <p:cSld>
     <p:spTree>
@@ -19020,260 +19221,6 @@
     <p:extLst>
       <p:ext uri="{BB962C8B-B14F-4D97-AF65-F5344CB8AC3E}">
         <p14:creationId xmlns:p14="http://schemas.microsoft.com/office/powerpoint/2010/main" val="1588550209"/>
-      </p:ext>
-    </p:extLst>
-  </p:cSld>
-  <p:clrMapOvr>
-    <a:masterClrMapping/>
-  </p:clrMapOvr>
-</p:sld>
-</file>
-
-<file path=ppt/slides/slide139.xml><?xml version="1.0" encoding="utf-8"?>
-<p:sld xmlns:a="http://schemas.openxmlformats.org/drawingml/2006/main" xmlns:r="http://schemas.openxmlformats.org/officeDocument/2006/relationships" xmlns:p="http://schemas.openxmlformats.org/presentationml/2006/main">
-  <p:cSld>
-    <p:spTree>
-      <p:nvGrpSpPr>
-        <p:cNvPr id="1" name="">
-          <a:extLst>
-            <a:ext uri="{FF2B5EF4-FFF2-40B4-BE49-F238E27FC236}">
-              <a16:creationId xmlns:a16="http://schemas.microsoft.com/office/drawing/2014/main" id="{68DF5FD7-ABBF-0C5F-13BE-EBC1141404C0}"/>
-            </a:ext>
-          </a:extLst>
-        </p:cNvPr>
-        <p:cNvGrpSpPr/>
-        <p:nvPr/>
-      </p:nvGrpSpPr>
-      <p:grpSpPr>
-        <a:xfrm>
-          <a:off x="0" y="0"/>
-          <a:ext cx="0" cy="0"/>
-          <a:chOff x="0" y="0"/>
-          <a:chExt cx="0" cy="0"/>
-        </a:xfrm>
-      </p:grpSpPr>
-      <p:sp>
-        <p:nvSpPr>
-          <p:cNvPr id="3" name="Content Placeholder 2">
-            <a:extLst>
-              <a:ext uri="{FF2B5EF4-FFF2-40B4-BE49-F238E27FC236}">
-                <a16:creationId xmlns:a16="http://schemas.microsoft.com/office/drawing/2014/main" id="{F9839DE1-6981-7E86-1DEA-7C7859CE4E28}"/>
-              </a:ext>
-            </a:extLst>
-          </p:cNvPr>
-          <p:cNvSpPr>
-            <a:spLocks noGrp="1"/>
-          </p:cNvSpPr>
-          <p:nvPr>
-            <p:ph idx="1"/>
-          </p:nvPr>
-        </p:nvSpPr>
-        <p:spPr>
-          <a:xfrm>
-            <a:off x="702853" y="620486"/>
-            <a:ext cx="10900568" cy="5529943"/>
-          </a:xfrm>
-        </p:spPr>
-        <p:txBody>
-          <a:bodyPr>
-            <a:normAutofit/>
-          </a:bodyPr>
-          <a:lstStyle/>
-          <a:p>
-            <a:pPr marL="0" indent="0">
-              <a:buNone/>
-            </a:pPr>
-            <a:r>
-              <a:rPr lang="en-US" sz="2800" b="1" dirty="0"/>
-              <a:t>What is a Grid of Hyperparameters?</a:t>
-            </a:r>
-          </a:p>
-          <a:p>
-            <a:pPr marL="0" indent="0">
-              <a:buNone/>
-            </a:pPr>
-            <a:r>
-              <a:rPr lang="en-US" sz="2400" dirty="0"/>
-              <a:t>A grid of hyperparameters is a </a:t>
-            </a:r>
-            <a:r>
-              <a:rPr lang="en-US" sz="2400" b="1" dirty="0">
-                <a:solidFill>
-                  <a:srgbClr val="C00000"/>
-                </a:solidFill>
-              </a:rPr>
-              <a:t>dictionary</a:t>
-            </a:r>
-            <a:r>
-              <a:rPr lang="en-US" sz="2400" dirty="0"/>
-              <a:t> or </a:t>
-            </a:r>
-            <a:r>
-              <a:rPr lang="en-US" sz="2400" b="1" dirty="0">
-                <a:solidFill>
-                  <a:srgbClr val="C00000"/>
-                </a:solidFill>
-              </a:rPr>
-              <a:t>table</a:t>
-            </a:r>
-            <a:r>
-              <a:rPr lang="en-US" sz="2400" dirty="0"/>
-              <a:t> of </a:t>
-            </a:r>
-            <a:r>
-              <a:rPr lang="en-US" sz="2400" b="1" dirty="0"/>
-              <a:t>possible values for each hyperparameter</a:t>
-            </a:r>
-            <a:r>
-              <a:rPr lang="en-US" sz="2400" dirty="0"/>
-              <a:t> that you want to tune in a machine learning model.</a:t>
-            </a:r>
-          </a:p>
-          <a:p>
-            <a:r>
-              <a:rPr lang="en-US" sz="2400" dirty="0"/>
-              <a:t>It's used to systematically </a:t>
-            </a:r>
-            <a:r>
-              <a:rPr lang="en-US" sz="2400" b="1" dirty="0"/>
-              <a:t>explore</a:t>
-            </a:r>
-            <a:r>
-              <a:rPr lang="en-US" sz="2400" dirty="0"/>
-              <a:t> </a:t>
-            </a:r>
-            <a:r>
-              <a:rPr lang="en-US" sz="2400" b="1" dirty="0">
-                <a:solidFill>
-                  <a:srgbClr val="C00000"/>
-                </a:solidFill>
-              </a:rPr>
-              <a:t>different combinations </a:t>
-            </a:r>
-            <a:r>
-              <a:rPr lang="en-US" sz="2400" dirty="0"/>
-              <a:t>during </a:t>
-            </a:r>
-            <a:r>
-              <a:rPr lang="en-US" sz="2400" b="1" dirty="0"/>
-              <a:t>hyperparameter tuning</a:t>
-            </a:r>
-            <a:r>
-              <a:rPr lang="en-US" sz="2400" dirty="0"/>
-              <a:t>, typically with tools like </a:t>
-            </a:r>
-            <a:r>
-              <a:rPr lang="en-US" sz="2400" b="1" dirty="0" err="1">
-                <a:solidFill>
-                  <a:srgbClr val="C00000"/>
-                </a:solidFill>
-              </a:rPr>
-              <a:t>GridSearchCV</a:t>
-            </a:r>
-            <a:r>
-              <a:rPr lang="en-US" sz="2400"/>
-              <a:t>.</a:t>
-            </a:r>
-            <a:endParaRPr lang="en-US" sz="2400" dirty="0"/>
-          </a:p>
-          <a:p>
-            <a:r>
-              <a:rPr lang="en-US" sz="2400" b="1" dirty="0"/>
-              <a:t>Think of it Like:</a:t>
-            </a:r>
-          </a:p>
-          <a:p>
-            <a:pPr lvl="1"/>
-            <a:r>
-              <a:rPr lang="en-US" sz="2400" b="1" dirty="0"/>
-              <a:t>You define:</a:t>
-            </a:r>
-          </a:p>
-          <a:p>
-            <a:pPr lvl="2"/>
-            <a:r>
-              <a:rPr lang="en-US" sz="2400" b="1" dirty="0">
-                <a:solidFill>
-                  <a:srgbClr val="C00000"/>
-                </a:solidFill>
-              </a:rPr>
-              <a:t>Several</a:t>
-            </a:r>
-            <a:r>
-              <a:rPr lang="en-US" sz="2400" dirty="0"/>
-              <a:t> hyperparameters</a:t>
-            </a:r>
-          </a:p>
-          <a:p>
-            <a:pPr lvl="2"/>
-            <a:r>
-              <a:rPr lang="en-US" sz="2400" dirty="0"/>
-              <a:t>A </a:t>
-            </a:r>
-            <a:r>
-              <a:rPr lang="en-US" sz="2400" b="1" dirty="0">
-                <a:solidFill>
-                  <a:srgbClr val="C00000"/>
-                </a:solidFill>
-              </a:rPr>
-              <a:t>list of values </a:t>
-            </a:r>
-            <a:r>
-              <a:rPr lang="en-US" sz="2400" dirty="0"/>
-              <a:t>you want to try for each</a:t>
-            </a:r>
-          </a:p>
-          <a:p>
-            <a:pPr lvl="1"/>
-            <a:r>
-              <a:rPr lang="en-US" sz="2200" b="1" dirty="0"/>
-              <a:t>Then</a:t>
-            </a:r>
-            <a:r>
-              <a:rPr lang="en-US" sz="2200" dirty="0"/>
-              <a:t>:</a:t>
-            </a:r>
-          </a:p>
-          <a:p>
-            <a:pPr lvl="2"/>
-            <a:r>
-              <a:rPr lang="en-US" sz="2200" dirty="0"/>
-              <a:t>The "</a:t>
-            </a:r>
-            <a:r>
-              <a:rPr lang="en-US" sz="2200" b="1" dirty="0">
-                <a:solidFill>
-                  <a:srgbClr val="C00000"/>
-                </a:solidFill>
-              </a:rPr>
-              <a:t>grid</a:t>
-            </a:r>
-            <a:r>
-              <a:rPr lang="en-US" sz="2200" dirty="0"/>
-              <a:t>" is the </a:t>
-            </a:r>
-            <a:r>
-              <a:rPr lang="en-US" sz="2200" b="1" dirty="0">
-                <a:solidFill>
-                  <a:srgbClr val="C00000"/>
-                </a:solidFill>
-              </a:rPr>
-              <a:t>cartesian product </a:t>
-            </a:r>
-            <a:r>
-              <a:rPr lang="en-US" sz="2200" dirty="0"/>
-              <a:t>of all those values (i.e., all possible combinations).</a:t>
-            </a:r>
-          </a:p>
-          <a:p>
-            <a:endParaRPr lang="en-IN" sz="2400" dirty="0"/>
-          </a:p>
-        </p:txBody>
-      </p:sp>
-    </p:spTree>
-    <p:extLst>
-      <p:ext uri="{BB962C8B-B14F-4D97-AF65-F5344CB8AC3E}">
-        <p14:creationId xmlns:p14="http://schemas.microsoft.com/office/powerpoint/2010/main" val="2163735156"/>
       </p:ext>
     </p:extLst>
   </p:cSld>
@@ -19510,6 +19457,260 @@
         <p:cNvPr id="1" name="">
           <a:extLst>
             <a:ext uri="{FF2B5EF4-FFF2-40B4-BE49-F238E27FC236}">
+              <a16:creationId xmlns:a16="http://schemas.microsoft.com/office/drawing/2014/main" id="{68DF5FD7-ABBF-0C5F-13BE-EBC1141404C0}"/>
+            </a:ext>
+          </a:extLst>
+        </p:cNvPr>
+        <p:cNvGrpSpPr/>
+        <p:nvPr/>
+      </p:nvGrpSpPr>
+      <p:grpSpPr>
+        <a:xfrm>
+          <a:off x="0" y="0"/>
+          <a:ext cx="0" cy="0"/>
+          <a:chOff x="0" y="0"/>
+          <a:chExt cx="0" cy="0"/>
+        </a:xfrm>
+      </p:grpSpPr>
+      <p:sp>
+        <p:nvSpPr>
+          <p:cNvPr id="3" name="Content Placeholder 2">
+            <a:extLst>
+              <a:ext uri="{FF2B5EF4-FFF2-40B4-BE49-F238E27FC236}">
+                <a16:creationId xmlns:a16="http://schemas.microsoft.com/office/drawing/2014/main" id="{F9839DE1-6981-7E86-1DEA-7C7859CE4E28}"/>
+              </a:ext>
+            </a:extLst>
+          </p:cNvPr>
+          <p:cNvSpPr>
+            <a:spLocks noGrp="1"/>
+          </p:cNvSpPr>
+          <p:nvPr>
+            <p:ph idx="1"/>
+          </p:nvPr>
+        </p:nvSpPr>
+        <p:spPr>
+          <a:xfrm>
+            <a:off x="702853" y="620486"/>
+            <a:ext cx="10900568" cy="5529943"/>
+          </a:xfrm>
+        </p:spPr>
+        <p:txBody>
+          <a:bodyPr>
+            <a:normAutofit/>
+          </a:bodyPr>
+          <a:lstStyle/>
+          <a:p>
+            <a:pPr marL="0" indent="0">
+              <a:buNone/>
+            </a:pPr>
+            <a:r>
+              <a:rPr lang="en-US" sz="2800" b="1" dirty="0"/>
+              <a:t>What is a Grid of Hyperparameters?</a:t>
+            </a:r>
+          </a:p>
+          <a:p>
+            <a:pPr marL="0" indent="0">
+              <a:buNone/>
+            </a:pPr>
+            <a:r>
+              <a:rPr lang="en-US" sz="2400" dirty="0"/>
+              <a:t>A grid of hyperparameters is a </a:t>
+            </a:r>
+            <a:r>
+              <a:rPr lang="en-US" sz="2400" b="1" dirty="0">
+                <a:solidFill>
+                  <a:srgbClr val="C00000"/>
+                </a:solidFill>
+              </a:rPr>
+              <a:t>dictionary</a:t>
+            </a:r>
+            <a:r>
+              <a:rPr lang="en-US" sz="2400" dirty="0"/>
+              <a:t> or </a:t>
+            </a:r>
+            <a:r>
+              <a:rPr lang="en-US" sz="2400" b="1" dirty="0">
+                <a:solidFill>
+                  <a:srgbClr val="C00000"/>
+                </a:solidFill>
+              </a:rPr>
+              <a:t>table</a:t>
+            </a:r>
+            <a:r>
+              <a:rPr lang="en-US" sz="2400" dirty="0"/>
+              <a:t> of </a:t>
+            </a:r>
+            <a:r>
+              <a:rPr lang="en-US" sz="2400" b="1" dirty="0"/>
+              <a:t>possible values for each hyperparameter</a:t>
+            </a:r>
+            <a:r>
+              <a:rPr lang="en-US" sz="2400" dirty="0"/>
+              <a:t> that you want to tune in a machine learning model.</a:t>
+            </a:r>
+          </a:p>
+          <a:p>
+            <a:r>
+              <a:rPr lang="en-US" sz="2400" dirty="0"/>
+              <a:t>It's used to systematically </a:t>
+            </a:r>
+            <a:r>
+              <a:rPr lang="en-US" sz="2400" b="1" dirty="0"/>
+              <a:t>explore</a:t>
+            </a:r>
+            <a:r>
+              <a:rPr lang="en-US" sz="2400" dirty="0"/>
+              <a:t> </a:t>
+            </a:r>
+            <a:r>
+              <a:rPr lang="en-US" sz="2400" b="1" dirty="0">
+                <a:solidFill>
+                  <a:srgbClr val="C00000"/>
+                </a:solidFill>
+              </a:rPr>
+              <a:t>different combinations </a:t>
+            </a:r>
+            <a:r>
+              <a:rPr lang="en-US" sz="2400" dirty="0"/>
+              <a:t>during </a:t>
+            </a:r>
+            <a:r>
+              <a:rPr lang="en-US" sz="2400" b="1" dirty="0"/>
+              <a:t>hyperparameter tuning</a:t>
+            </a:r>
+            <a:r>
+              <a:rPr lang="en-US" sz="2400" dirty="0"/>
+              <a:t>, typically with tools like </a:t>
+            </a:r>
+            <a:r>
+              <a:rPr lang="en-US" sz="2400" b="1" dirty="0" err="1">
+                <a:solidFill>
+                  <a:srgbClr val="C00000"/>
+                </a:solidFill>
+              </a:rPr>
+              <a:t>GridSearchCV</a:t>
+            </a:r>
+            <a:r>
+              <a:rPr lang="en-US" sz="2400"/>
+              <a:t>.</a:t>
+            </a:r>
+            <a:endParaRPr lang="en-US" sz="2400" dirty="0"/>
+          </a:p>
+          <a:p>
+            <a:r>
+              <a:rPr lang="en-US" sz="2400" b="1" dirty="0"/>
+              <a:t>Think of it Like:</a:t>
+            </a:r>
+          </a:p>
+          <a:p>
+            <a:pPr lvl="1"/>
+            <a:r>
+              <a:rPr lang="en-US" sz="2400" b="1" dirty="0"/>
+              <a:t>You define:</a:t>
+            </a:r>
+          </a:p>
+          <a:p>
+            <a:pPr lvl="2"/>
+            <a:r>
+              <a:rPr lang="en-US" sz="2400" b="1" dirty="0">
+                <a:solidFill>
+                  <a:srgbClr val="C00000"/>
+                </a:solidFill>
+              </a:rPr>
+              <a:t>Several</a:t>
+            </a:r>
+            <a:r>
+              <a:rPr lang="en-US" sz="2400" dirty="0"/>
+              <a:t> hyperparameters</a:t>
+            </a:r>
+          </a:p>
+          <a:p>
+            <a:pPr lvl="2"/>
+            <a:r>
+              <a:rPr lang="en-US" sz="2400" dirty="0"/>
+              <a:t>A </a:t>
+            </a:r>
+            <a:r>
+              <a:rPr lang="en-US" sz="2400" b="1" dirty="0">
+                <a:solidFill>
+                  <a:srgbClr val="C00000"/>
+                </a:solidFill>
+              </a:rPr>
+              <a:t>list of values </a:t>
+            </a:r>
+            <a:r>
+              <a:rPr lang="en-US" sz="2400" dirty="0"/>
+              <a:t>you want to try for each</a:t>
+            </a:r>
+          </a:p>
+          <a:p>
+            <a:pPr lvl="1"/>
+            <a:r>
+              <a:rPr lang="en-US" sz="2200" b="1" dirty="0"/>
+              <a:t>Then</a:t>
+            </a:r>
+            <a:r>
+              <a:rPr lang="en-US" sz="2200" dirty="0"/>
+              <a:t>:</a:t>
+            </a:r>
+          </a:p>
+          <a:p>
+            <a:pPr lvl="2"/>
+            <a:r>
+              <a:rPr lang="en-US" sz="2200" dirty="0"/>
+              <a:t>The "</a:t>
+            </a:r>
+            <a:r>
+              <a:rPr lang="en-US" sz="2200" b="1" dirty="0">
+                <a:solidFill>
+                  <a:srgbClr val="C00000"/>
+                </a:solidFill>
+              </a:rPr>
+              <a:t>grid</a:t>
+            </a:r>
+            <a:r>
+              <a:rPr lang="en-US" sz="2200" dirty="0"/>
+              <a:t>" is the </a:t>
+            </a:r>
+            <a:r>
+              <a:rPr lang="en-US" sz="2200" b="1" dirty="0">
+                <a:solidFill>
+                  <a:srgbClr val="C00000"/>
+                </a:solidFill>
+              </a:rPr>
+              <a:t>cartesian product </a:t>
+            </a:r>
+            <a:r>
+              <a:rPr lang="en-US" sz="2200" dirty="0"/>
+              <a:t>of all those values (i.e., all possible combinations).</a:t>
+            </a:r>
+          </a:p>
+          <a:p>
+            <a:endParaRPr lang="en-IN" sz="2400" dirty="0"/>
+          </a:p>
+        </p:txBody>
+      </p:sp>
+    </p:spTree>
+    <p:extLst>
+      <p:ext uri="{BB962C8B-B14F-4D97-AF65-F5344CB8AC3E}">
+        <p14:creationId xmlns:p14="http://schemas.microsoft.com/office/powerpoint/2010/main" val="2163735156"/>
+      </p:ext>
+    </p:extLst>
+  </p:cSld>
+  <p:clrMapOvr>
+    <a:masterClrMapping/>
+  </p:clrMapOvr>
+</p:sld>
+</file>
+
+<file path=ppt/slides/slide141.xml><?xml version="1.0" encoding="utf-8"?>
+<p:sld xmlns:a="http://schemas.openxmlformats.org/drawingml/2006/main" xmlns:r="http://schemas.openxmlformats.org/officeDocument/2006/relationships" xmlns:p="http://schemas.openxmlformats.org/presentationml/2006/main">
+  <p:cSld>
+    <p:spTree>
+      <p:nvGrpSpPr>
+        <p:cNvPr id="1" name="">
+          <a:extLst>
+            <a:ext uri="{FF2B5EF4-FFF2-40B4-BE49-F238E27FC236}">
               <a16:creationId xmlns:a16="http://schemas.microsoft.com/office/drawing/2014/main" id="{5348CE61-5D1F-C6D6-2545-42C477B5D155}"/>
             </a:ext>
           </a:extLst>
@@ -19854,7 +20055,7 @@
 </p:sld>
 </file>
 
-<file path=ppt/slides/slide141.xml><?xml version="1.0" encoding="utf-8"?>
+<file path=ppt/slides/slide142.xml><?xml version="1.0" encoding="utf-8"?>
 <p:sld xmlns:a="http://schemas.openxmlformats.org/drawingml/2006/main" xmlns:r="http://schemas.openxmlformats.org/officeDocument/2006/relationships" xmlns:p="http://schemas.openxmlformats.org/presentationml/2006/main">
   <p:cSld>
     <p:spTree>
@@ -20005,7 +20206,7 @@
 </p:sld>
 </file>
 
-<file path=ppt/slides/slide142.xml><?xml version="1.0" encoding="utf-8"?>
+<file path=ppt/slides/slide143.xml><?xml version="1.0" encoding="utf-8"?>
 <p:sld xmlns:a="http://schemas.openxmlformats.org/drawingml/2006/main" xmlns:r="http://schemas.openxmlformats.org/officeDocument/2006/relationships" xmlns:p="http://schemas.openxmlformats.org/presentationml/2006/main">
   <p:cSld>
     <p:spTree>
@@ -20189,7 +20390,7 @@
 </p:sld>
 </file>
 
-<file path=ppt/slides/slide143.xml><?xml version="1.0" encoding="utf-8"?>
+<file path=ppt/slides/slide144.xml><?xml version="1.0" encoding="utf-8"?>
 <p:sld xmlns:a="http://schemas.openxmlformats.org/drawingml/2006/main" xmlns:r="http://schemas.openxmlformats.org/officeDocument/2006/relationships" xmlns:p="http://schemas.openxmlformats.org/presentationml/2006/main">
   <p:cSld>
     <p:spTree>
@@ -20356,7 +20557,7 @@
 </p:sld>
 </file>
 
-<file path=ppt/slides/slide144.xml><?xml version="1.0" encoding="utf-8"?>
+<file path=ppt/slides/slide145.xml><?xml version="1.0" encoding="utf-8"?>
 <p:sld xmlns:a="http://schemas.openxmlformats.org/drawingml/2006/main" xmlns:r="http://schemas.openxmlformats.org/officeDocument/2006/relationships" xmlns:p="http://schemas.openxmlformats.org/presentationml/2006/main">
   <p:cSld>
     <p:spTree>
@@ -20601,7 +20802,7 @@
 </p:sld>
 </file>
 
-<file path=ppt/slides/slide145.xml><?xml version="1.0" encoding="utf-8"?>
+<file path=ppt/slides/slide146.xml><?xml version="1.0" encoding="utf-8"?>
 <p:sld xmlns:a="http://schemas.openxmlformats.org/drawingml/2006/main" xmlns:r="http://schemas.openxmlformats.org/officeDocument/2006/relationships" xmlns:p="http://schemas.openxmlformats.org/presentationml/2006/main">
   <p:cSld>
     <p:spTree>
@@ -20716,7 +20917,7 @@
 </p:sld>
 </file>
 
-<file path=ppt/slides/slide146.xml><?xml version="1.0" encoding="utf-8"?>
+<file path=ppt/slides/slide147.xml><?xml version="1.0" encoding="utf-8"?>
 <p:sld xmlns:a="http://schemas.openxmlformats.org/drawingml/2006/main" xmlns:r="http://schemas.openxmlformats.org/officeDocument/2006/relationships" xmlns:p="http://schemas.openxmlformats.org/presentationml/2006/main">
   <p:cSld>
     <p:spTree>
@@ -20940,7 +21141,7 @@
 </p:sld>
 </file>
 
-<file path=ppt/slides/slide147.xml><?xml version="1.0" encoding="utf-8"?>
+<file path=ppt/slides/slide148.xml><?xml version="1.0" encoding="utf-8"?>
 <p:sld xmlns:a="http://schemas.openxmlformats.org/drawingml/2006/main" xmlns:r="http://schemas.openxmlformats.org/officeDocument/2006/relationships" xmlns:p="http://schemas.openxmlformats.org/presentationml/2006/main">
   <p:cSld>
     <p:spTree>
@@ -21168,7 +21369,7 @@
 </p:sld>
 </file>
 
-<file path=ppt/slides/slide148.xml><?xml version="1.0" encoding="utf-8"?>
+<file path=ppt/slides/slide149.xml><?xml version="1.0" encoding="utf-8"?>
 <p:sld xmlns:a="http://schemas.openxmlformats.org/drawingml/2006/main" xmlns:r="http://schemas.openxmlformats.org/officeDocument/2006/relationships" xmlns:p="http://schemas.openxmlformats.org/presentationml/2006/main">
   <p:cSld>
     <p:spTree>
@@ -21342,410 +21543,6 @@
     <p:extLst>
       <p:ext uri="{BB962C8B-B14F-4D97-AF65-F5344CB8AC3E}">
         <p14:creationId xmlns:p14="http://schemas.microsoft.com/office/powerpoint/2010/main" val="2463736200"/>
-      </p:ext>
-    </p:extLst>
-  </p:cSld>
-  <p:clrMapOvr>
-    <a:masterClrMapping/>
-  </p:clrMapOvr>
-</p:sld>
-</file>
-
-<file path=ppt/slides/slide149.xml><?xml version="1.0" encoding="utf-8"?>
-<p:sld xmlns:a="http://schemas.openxmlformats.org/drawingml/2006/main" xmlns:r="http://schemas.openxmlformats.org/officeDocument/2006/relationships" xmlns:p="http://schemas.openxmlformats.org/presentationml/2006/main">
-  <p:cSld>
-    <p:spTree>
-      <p:nvGrpSpPr>
-        <p:cNvPr id="1" name="">
-          <a:extLst>
-            <a:ext uri="{FF2B5EF4-FFF2-40B4-BE49-F238E27FC236}">
-              <a16:creationId xmlns:a16="http://schemas.microsoft.com/office/drawing/2014/main" id="{C5261E15-57AA-463F-E0A8-BDE0E86DE4A9}"/>
-            </a:ext>
-          </a:extLst>
-        </p:cNvPr>
-        <p:cNvGrpSpPr/>
-        <p:nvPr/>
-      </p:nvGrpSpPr>
-      <p:grpSpPr>
-        <a:xfrm>
-          <a:off x="0" y="0"/>
-          <a:ext cx="0" cy="0"/>
-          <a:chOff x="0" y="0"/>
-          <a:chExt cx="0" cy="0"/>
-        </a:xfrm>
-      </p:grpSpPr>
-      <p:sp>
-        <p:nvSpPr>
-          <p:cNvPr id="3" name="Content Placeholder 2">
-            <a:extLst>
-              <a:ext uri="{FF2B5EF4-FFF2-40B4-BE49-F238E27FC236}">
-                <a16:creationId xmlns:a16="http://schemas.microsoft.com/office/drawing/2014/main" id="{12B232B8-60FF-2045-BEEA-503EA8221EE1}"/>
-              </a:ext>
-            </a:extLst>
-          </p:cNvPr>
-          <p:cNvSpPr>
-            <a:spLocks noGrp="1"/>
-          </p:cNvSpPr>
-          <p:nvPr>
-            <p:ph idx="1"/>
-          </p:nvPr>
-        </p:nvSpPr>
-        <p:spPr>
-          <a:xfrm>
-            <a:off x="702853" y="500743"/>
-            <a:ext cx="10900568" cy="5932713"/>
-          </a:xfrm>
-        </p:spPr>
-        <p:txBody>
-          <a:bodyPr>
-            <a:normAutofit lnSpcReduction="10000"/>
-          </a:bodyPr>
-          <a:lstStyle/>
-          <a:p>
-            <a:pPr marL="0" indent="0">
-              <a:buNone/>
-            </a:pPr>
-            <a:r>
-              <a:rPr lang="en-US" sz="2800" b="1" dirty="0"/>
-              <a:t>🧠 Example (Real-life): </a:t>
-            </a:r>
-            <a:r>
-              <a:rPr lang="en-US" sz="2400" b="1" dirty="0">
-                <a:solidFill>
-                  <a:srgbClr val="C00000"/>
-                </a:solidFill>
-              </a:rPr>
-              <a:t>Predicting Student Exam Scores</a:t>
-            </a:r>
-          </a:p>
-          <a:p>
-            <a:pPr marL="0" indent="0">
-              <a:buNone/>
-            </a:pPr>
-            <a:r>
-              <a:rPr lang="en-US" sz="2400" dirty="0"/>
-              <a:t>Suppose we are building a model to predict students' exam scores based on their </a:t>
-            </a:r>
-            <a:r>
-              <a:rPr lang="en-US" sz="2400" b="1" dirty="0">
-                <a:solidFill>
-                  <a:srgbClr val="C00000"/>
-                </a:solidFill>
-              </a:rPr>
-              <a:t>hours of study</a:t>
-            </a:r>
-            <a:r>
-              <a:rPr lang="en-US" sz="2400" dirty="0"/>
-              <a:t>, </a:t>
-            </a:r>
-            <a:r>
-              <a:rPr lang="en-US" sz="2400" b="1" dirty="0">
-                <a:solidFill>
-                  <a:srgbClr val="C00000"/>
-                </a:solidFill>
-              </a:rPr>
-              <a:t>attendance</a:t>
-            </a:r>
-            <a:r>
-              <a:rPr lang="en-US" sz="2400" dirty="0"/>
-              <a:t>, and </a:t>
-            </a:r>
-            <a:r>
-              <a:rPr lang="en-US" sz="2400" b="1" dirty="0">
-                <a:solidFill>
-                  <a:srgbClr val="C00000"/>
-                </a:solidFill>
-              </a:rPr>
-              <a:t>previous</a:t>
-            </a:r>
-            <a:r>
-              <a:rPr lang="en-US" sz="2400" b="1" dirty="0"/>
-              <a:t> </a:t>
-            </a:r>
-            <a:r>
-              <a:rPr lang="en-US" sz="2400" b="1" dirty="0">
-                <a:solidFill>
-                  <a:srgbClr val="C00000"/>
-                </a:solidFill>
-              </a:rPr>
-              <a:t>marks</a:t>
-            </a:r>
-            <a:r>
-              <a:rPr lang="en-US" sz="2400" dirty="0"/>
-              <a:t>.</a:t>
-            </a:r>
-          </a:p>
-          <a:p>
-            <a:pPr marL="0" indent="0">
-              <a:buNone/>
-            </a:pPr>
-            <a:r>
-              <a:rPr lang="en-US" sz="2400" b="1" dirty="0"/>
-              <a:t>📉 Underfitting:</a:t>
-            </a:r>
-          </a:p>
-          <a:p>
-            <a:pPr lvl="1"/>
-            <a:r>
-              <a:rPr lang="en-US" sz="2200" dirty="0"/>
-              <a:t>You use only </a:t>
-            </a:r>
-            <a:r>
-              <a:rPr lang="en-US" sz="2200" b="1" dirty="0"/>
-              <a:t>hours of study</a:t>
-            </a:r>
-            <a:r>
-              <a:rPr lang="en-US" sz="2200" dirty="0"/>
-              <a:t> as the input.</a:t>
-            </a:r>
-          </a:p>
-          <a:p>
-            <a:pPr lvl="1"/>
-            <a:r>
-              <a:rPr lang="en-US" sz="2200" dirty="0"/>
-              <a:t>The model is too simple and fails to capture the real influence of attendance or previous performance.</a:t>
-            </a:r>
-          </a:p>
-          <a:p>
-            <a:pPr lvl="1"/>
-            <a:r>
-              <a:rPr lang="en-US" sz="2200" b="1" dirty="0"/>
-              <a:t>Result</a:t>
-            </a:r>
-            <a:r>
-              <a:rPr lang="en-US" sz="2200" dirty="0"/>
-              <a:t>: </a:t>
-            </a:r>
-            <a:r>
-              <a:rPr lang="en-US" sz="2200" b="1" dirty="0">
-                <a:solidFill>
-                  <a:srgbClr val="C00000"/>
-                </a:solidFill>
-              </a:rPr>
-              <a:t>Poor accuracy</a:t>
-            </a:r>
-            <a:r>
-              <a:rPr lang="en-US" sz="2200" dirty="0">
-                <a:solidFill>
-                  <a:srgbClr val="C00000"/>
-                </a:solidFill>
-              </a:rPr>
-              <a:t> </a:t>
-            </a:r>
-            <a:r>
-              <a:rPr lang="en-US" sz="2200" dirty="0"/>
-              <a:t>on both training and test data.</a:t>
-            </a:r>
-          </a:p>
-          <a:p>
-            <a:pPr marL="0" indent="0">
-              <a:buNone/>
-            </a:pPr>
-            <a:r>
-              <a:rPr lang="en-US" sz="2400" b="1" dirty="0"/>
-              <a:t>📈 Overfitting:</a:t>
-            </a:r>
-          </a:p>
-          <a:p>
-            <a:pPr lvl="1"/>
-            <a:r>
-              <a:rPr lang="en-US" sz="2200" dirty="0"/>
-              <a:t>You include too many features like </a:t>
-            </a:r>
-            <a:r>
-              <a:rPr lang="en-US" sz="2200" b="1" dirty="0"/>
-              <a:t>hair color</a:t>
-            </a:r>
-            <a:r>
-              <a:rPr lang="en-US" sz="2200" dirty="0"/>
-              <a:t>, </a:t>
-            </a:r>
-            <a:r>
-              <a:rPr lang="en-US" sz="2200" b="1" dirty="0"/>
-              <a:t>favorite food</a:t>
-            </a:r>
-            <a:r>
-              <a:rPr lang="en-US" sz="2200" dirty="0"/>
-              <a:t>, or </a:t>
-            </a:r>
-            <a:r>
-              <a:rPr lang="en-US" sz="2200" b="1" dirty="0"/>
-              <a:t>student ID</a:t>
-            </a:r>
-            <a:r>
-              <a:rPr lang="en-US" sz="2200" dirty="0"/>
-              <a:t>.</a:t>
-            </a:r>
-          </a:p>
-          <a:p>
-            <a:pPr lvl="1"/>
-            <a:r>
-              <a:rPr lang="en-US" sz="2200" dirty="0"/>
-              <a:t>The model memorizes the training data, including irrelevant details.</a:t>
-            </a:r>
-          </a:p>
-          <a:p>
-            <a:pPr lvl="1"/>
-            <a:r>
-              <a:rPr lang="en-US" sz="2200" dirty="0"/>
-              <a:t>Result: </a:t>
-            </a:r>
-            <a:r>
-              <a:rPr lang="en-US" sz="2200" b="1" dirty="0"/>
-              <a:t>Very high accuracy</a:t>
-            </a:r>
-            <a:r>
-              <a:rPr lang="en-US" sz="2200" dirty="0"/>
-              <a:t> on training data but </a:t>
-            </a:r>
-            <a:r>
-              <a:rPr lang="en-US" sz="2200" b="1" dirty="0"/>
-              <a:t>poor performance</a:t>
-            </a:r>
-            <a:r>
-              <a:rPr lang="en-US" sz="2200" dirty="0"/>
-              <a:t> on new (test) data.</a:t>
-            </a:r>
-          </a:p>
-          <a:p>
-            <a:pPr marL="0" indent="0">
-              <a:buNone/>
-            </a:pPr>
-            <a:r>
-              <a:rPr lang="en-US" sz="2400" b="1" dirty="0"/>
-              <a:t>✅ Good Fit:</a:t>
-            </a:r>
-          </a:p>
-          <a:p>
-            <a:pPr lvl="1"/>
-            <a:r>
-              <a:rPr lang="en-US" sz="2200" dirty="0"/>
-              <a:t>You use only </a:t>
-            </a:r>
-            <a:r>
-              <a:rPr lang="en-US" sz="2200" b="1" dirty="0"/>
-              <a:t>relevant features </a:t>
-            </a:r>
-            <a:r>
-              <a:rPr lang="en-US" sz="2200" dirty="0"/>
-              <a:t>like </a:t>
-            </a:r>
-            <a:r>
-              <a:rPr lang="en-US" sz="2200" b="1" dirty="0">
-                <a:solidFill>
-                  <a:srgbClr val="C00000"/>
-                </a:solidFill>
-              </a:rPr>
-              <a:t>hours</a:t>
-            </a:r>
-            <a:r>
-              <a:rPr lang="en-US" sz="2200" b="1" dirty="0"/>
-              <a:t> </a:t>
-            </a:r>
-            <a:r>
-              <a:rPr lang="en-US" sz="2200" b="1" dirty="0">
-                <a:solidFill>
-                  <a:srgbClr val="C00000"/>
-                </a:solidFill>
-              </a:rPr>
-              <a:t>of</a:t>
-            </a:r>
-            <a:r>
-              <a:rPr lang="en-US" sz="2200" b="1" dirty="0"/>
-              <a:t> </a:t>
-            </a:r>
-            <a:r>
-              <a:rPr lang="en-US" sz="2200" b="1" dirty="0">
-                <a:solidFill>
-                  <a:srgbClr val="C00000"/>
-                </a:solidFill>
-              </a:rPr>
-              <a:t>study</a:t>
-            </a:r>
-            <a:r>
-              <a:rPr lang="en-US" sz="2200" dirty="0"/>
-              <a:t>, </a:t>
-            </a:r>
-            <a:r>
-              <a:rPr lang="en-US" sz="2200" b="1" dirty="0">
-                <a:solidFill>
-                  <a:srgbClr val="C00000"/>
-                </a:solidFill>
-              </a:rPr>
-              <a:t>attendance</a:t>
-            </a:r>
-            <a:r>
-              <a:rPr lang="en-US" sz="2200" dirty="0"/>
-              <a:t>, and </a:t>
-            </a:r>
-            <a:r>
-              <a:rPr lang="en-US" sz="2200" b="1" dirty="0">
-                <a:solidFill>
-                  <a:srgbClr val="C00000"/>
-                </a:solidFill>
-              </a:rPr>
-              <a:t>previous</a:t>
-            </a:r>
-            <a:r>
-              <a:rPr lang="en-US" sz="2200" b="1" dirty="0"/>
-              <a:t> </a:t>
-            </a:r>
-            <a:r>
-              <a:rPr lang="en-US" sz="2200" b="1" dirty="0">
-                <a:solidFill>
-                  <a:srgbClr val="C00000"/>
-                </a:solidFill>
-              </a:rPr>
-              <a:t>marks</a:t>
-            </a:r>
-            <a:r>
-              <a:rPr lang="en-US" sz="2200" dirty="0"/>
-              <a:t>.</a:t>
-            </a:r>
-          </a:p>
-          <a:p>
-            <a:pPr lvl="1"/>
-            <a:r>
-              <a:rPr lang="en-US" sz="2200" dirty="0"/>
-              <a:t>The model </a:t>
-            </a:r>
-            <a:r>
-              <a:rPr lang="en-US" sz="2200" b="1" dirty="0">
-                <a:solidFill>
-                  <a:srgbClr val="C00000"/>
-                </a:solidFill>
-              </a:rPr>
-              <a:t>generalizes</a:t>
-            </a:r>
-            <a:r>
-              <a:rPr lang="en-US" sz="2200" dirty="0"/>
-              <a:t> </a:t>
-            </a:r>
-            <a:r>
-              <a:rPr lang="en-US" sz="2200" b="1" dirty="0">
-                <a:solidFill>
-                  <a:srgbClr val="C00000"/>
-                </a:solidFill>
-              </a:rPr>
-              <a:t>well</a:t>
-            </a:r>
-            <a:r>
-              <a:rPr lang="en-US" sz="2200" dirty="0"/>
-              <a:t> to new data and performs well on both training and test sets.</a:t>
-            </a:r>
-          </a:p>
-          <a:p>
-            <a:pPr marL="0" indent="0">
-              <a:buNone/>
-            </a:pPr>
-            <a:endParaRPr lang="en-IN" sz="2400" dirty="0"/>
-          </a:p>
-        </p:txBody>
-      </p:sp>
-    </p:spTree>
-    <p:extLst>
-      <p:ext uri="{BB962C8B-B14F-4D97-AF65-F5344CB8AC3E}">
-        <p14:creationId xmlns:p14="http://schemas.microsoft.com/office/powerpoint/2010/main" val="1976489112"/>
       </p:ext>
     </p:extLst>
   </p:cSld>
@@ -21962,6 +21759,410 @@
         <p:cNvPr id="1" name="">
           <a:extLst>
             <a:ext uri="{FF2B5EF4-FFF2-40B4-BE49-F238E27FC236}">
+              <a16:creationId xmlns:a16="http://schemas.microsoft.com/office/drawing/2014/main" id="{C5261E15-57AA-463F-E0A8-BDE0E86DE4A9}"/>
+            </a:ext>
+          </a:extLst>
+        </p:cNvPr>
+        <p:cNvGrpSpPr/>
+        <p:nvPr/>
+      </p:nvGrpSpPr>
+      <p:grpSpPr>
+        <a:xfrm>
+          <a:off x="0" y="0"/>
+          <a:ext cx="0" cy="0"/>
+          <a:chOff x="0" y="0"/>
+          <a:chExt cx="0" cy="0"/>
+        </a:xfrm>
+      </p:grpSpPr>
+      <p:sp>
+        <p:nvSpPr>
+          <p:cNvPr id="3" name="Content Placeholder 2">
+            <a:extLst>
+              <a:ext uri="{FF2B5EF4-FFF2-40B4-BE49-F238E27FC236}">
+                <a16:creationId xmlns:a16="http://schemas.microsoft.com/office/drawing/2014/main" id="{12B232B8-60FF-2045-BEEA-503EA8221EE1}"/>
+              </a:ext>
+            </a:extLst>
+          </p:cNvPr>
+          <p:cNvSpPr>
+            <a:spLocks noGrp="1"/>
+          </p:cNvSpPr>
+          <p:nvPr>
+            <p:ph idx="1"/>
+          </p:nvPr>
+        </p:nvSpPr>
+        <p:spPr>
+          <a:xfrm>
+            <a:off x="702853" y="500743"/>
+            <a:ext cx="10900568" cy="5932713"/>
+          </a:xfrm>
+        </p:spPr>
+        <p:txBody>
+          <a:bodyPr>
+            <a:normAutofit lnSpcReduction="10000"/>
+          </a:bodyPr>
+          <a:lstStyle/>
+          <a:p>
+            <a:pPr marL="0" indent="0">
+              <a:buNone/>
+            </a:pPr>
+            <a:r>
+              <a:rPr lang="en-US" sz="2800" b="1" dirty="0"/>
+              <a:t>🧠 Example (Real-life): </a:t>
+            </a:r>
+            <a:r>
+              <a:rPr lang="en-US" sz="2400" b="1" dirty="0">
+                <a:solidFill>
+                  <a:srgbClr val="C00000"/>
+                </a:solidFill>
+              </a:rPr>
+              <a:t>Predicting Student Exam Scores</a:t>
+            </a:r>
+          </a:p>
+          <a:p>
+            <a:pPr marL="0" indent="0">
+              <a:buNone/>
+            </a:pPr>
+            <a:r>
+              <a:rPr lang="en-US" sz="2400" dirty="0"/>
+              <a:t>Suppose we are building a model to predict students' exam scores based on their </a:t>
+            </a:r>
+            <a:r>
+              <a:rPr lang="en-US" sz="2400" b="1" dirty="0">
+                <a:solidFill>
+                  <a:srgbClr val="C00000"/>
+                </a:solidFill>
+              </a:rPr>
+              <a:t>hours of study</a:t>
+            </a:r>
+            <a:r>
+              <a:rPr lang="en-US" sz="2400" dirty="0"/>
+              <a:t>, </a:t>
+            </a:r>
+            <a:r>
+              <a:rPr lang="en-US" sz="2400" b="1" dirty="0">
+                <a:solidFill>
+                  <a:srgbClr val="C00000"/>
+                </a:solidFill>
+              </a:rPr>
+              <a:t>attendance</a:t>
+            </a:r>
+            <a:r>
+              <a:rPr lang="en-US" sz="2400" dirty="0"/>
+              <a:t>, and </a:t>
+            </a:r>
+            <a:r>
+              <a:rPr lang="en-US" sz="2400" b="1" dirty="0">
+                <a:solidFill>
+                  <a:srgbClr val="C00000"/>
+                </a:solidFill>
+              </a:rPr>
+              <a:t>previous</a:t>
+            </a:r>
+            <a:r>
+              <a:rPr lang="en-US" sz="2400" b="1" dirty="0"/>
+              <a:t> </a:t>
+            </a:r>
+            <a:r>
+              <a:rPr lang="en-US" sz="2400" b="1" dirty="0">
+                <a:solidFill>
+                  <a:srgbClr val="C00000"/>
+                </a:solidFill>
+              </a:rPr>
+              <a:t>marks</a:t>
+            </a:r>
+            <a:r>
+              <a:rPr lang="en-US" sz="2400" dirty="0"/>
+              <a:t>.</a:t>
+            </a:r>
+          </a:p>
+          <a:p>
+            <a:pPr marL="0" indent="0">
+              <a:buNone/>
+            </a:pPr>
+            <a:r>
+              <a:rPr lang="en-US" sz="2400" b="1" dirty="0"/>
+              <a:t>📉 Underfitting:</a:t>
+            </a:r>
+          </a:p>
+          <a:p>
+            <a:pPr lvl="1"/>
+            <a:r>
+              <a:rPr lang="en-US" sz="2200" dirty="0"/>
+              <a:t>You use only </a:t>
+            </a:r>
+            <a:r>
+              <a:rPr lang="en-US" sz="2200" b="1" dirty="0"/>
+              <a:t>hours of study</a:t>
+            </a:r>
+            <a:r>
+              <a:rPr lang="en-US" sz="2200" dirty="0"/>
+              <a:t> as the input.</a:t>
+            </a:r>
+          </a:p>
+          <a:p>
+            <a:pPr lvl="1"/>
+            <a:r>
+              <a:rPr lang="en-US" sz="2200" dirty="0"/>
+              <a:t>The model is too simple and fails to capture the real influence of attendance or previous performance.</a:t>
+            </a:r>
+          </a:p>
+          <a:p>
+            <a:pPr lvl="1"/>
+            <a:r>
+              <a:rPr lang="en-US" sz="2200" b="1" dirty="0"/>
+              <a:t>Result</a:t>
+            </a:r>
+            <a:r>
+              <a:rPr lang="en-US" sz="2200" dirty="0"/>
+              <a:t>: </a:t>
+            </a:r>
+            <a:r>
+              <a:rPr lang="en-US" sz="2200" b="1" dirty="0">
+                <a:solidFill>
+                  <a:srgbClr val="C00000"/>
+                </a:solidFill>
+              </a:rPr>
+              <a:t>Poor accuracy</a:t>
+            </a:r>
+            <a:r>
+              <a:rPr lang="en-US" sz="2200" dirty="0">
+                <a:solidFill>
+                  <a:srgbClr val="C00000"/>
+                </a:solidFill>
+              </a:rPr>
+              <a:t> </a:t>
+            </a:r>
+            <a:r>
+              <a:rPr lang="en-US" sz="2200" dirty="0"/>
+              <a:t>on both training and test data.</a:t>
+            </a:r>
+          </a:p>
+          <a:p>
+            <a:pPr marL="0" indent="0">
+              <a:buNone/>
+            </a:pPr>
+            <a:r>
+              <a:rPr lang="en-US" sz="2400" b="1" dirty="0"/>
+              <a:t>📈 Overfitting:</a:t>
+            </a:r>
+          </a:p>
+          <a:p>
+            <a:pPr lvl="1"/>
+            <a:r>
+              <a:rPr lang="en-US" sz="2200" dirty="0"/>
+              <a:t>You include too many features like </a:t>
+            </a:r>
+            <a:r>
+              <a:rPr lang="en-US" sz="2200" b="1" dirty="0"/>
+              <a:t>hair color</a:t>
+            </a:r>
+            <a:r>
+              <a:rPr lang="en-US" sz="2200" dirty="0"/>
+              <a:t>, </a:t>
+            </a:r>
+            <a:r>
+              <a:rPr lang="en-US" sz="2200" b="1" dirty="0"/>
+              <a:t>favorite food</a:t>
+            </a:r>
+            <a:r>
+              <a:rPr lang="en-US" sz="2200" dirty="0"/>
+              <a:t>, or </a:t>
+            </a:r>
+            <a:r>
+              <a:rPr lang="en-US" sz="2200" b="1" dirty="0"/>
+              <a:t>student ID</a:t>
+            </a:r>
+            <a:r>
+              <a:rPr lang="en-US" sz="2200" dirty="0"/>
+              <a:t>.</a:t>
+            </a:r>
+          </a:p>
+          <a:p>
+            <a:pPr lvl="1"/>
+            <a:r>
+              <a:rPr lang="en-US" sz="2200" dirty="0"/>
+              <a:t>The model memorizes the training data, including irrelevant details.</a:t>
+            </a:r>
+          </a:p>
+          <a:p>
+            <a:pPr lvl="1"/>
+            <a:r>
+              <a:rPr lang="en-US" sz="2200" dirty="0"/>
+              <a:t>Result: </a:t>
+            </a:r>
+            <a:r>
+              <a:rPr lang="en-US" sz="2200" b="1" dirty="0"/>
+              <a:t>Very high accuracy</a:t>
+            </a:r>
+            <a:r>
+              <a:rPr lang="en-US" sz="2200" dirty="0"/>
+              <a:t> on training data but </a:t>
+            </a:r>
+            <a:r>
+              <a:rPr lang="en-US" sz="2200" b="1" dirty="0"/>
+              <a:t>poor performance</a:t>
+            </a:r>
+            <a:r>
+              <a:rPr lang="en-US" sz="2200" dirty="0"/>
+              <a:t> on new (test) data.</a:t>
+            </a:r>
+          </a:p>
+          <a:p>
+            <a:pPr marL="0" indent="0">
+              <a:buNone/>
+            </a:pPr>
+            <a:r>
+              <a:rPr lang="en-US" sz="2400" b="1" dirty="0"/>
+              <a:t>✅ Good Fit:</a:t>
+            </a:r>
+          </a:p>
+          <a:p>
+            <a:pPr lvl="1"/>
+            <a:r>
+              <a:rPr lang="en-US" sz="2200" dirty="0"/>
+              <a:t>You use only </a:t>
+            </a:r>
+            <a:r>
+              <a:rPr lang="en-US" sz="2200" b="1" dirty="0"/>
+              <a:t>relevant features </a:t>
+            </a:r>
+            <a:r>
+              <a:rPr lang="en-US" sz="2200" dirty="0"/>
+              <a:t>like </a:t>
+            </a:r>
+            <a:r>
+              <a:rPr lang="en-US" sz="2200" b="1" dirty="0">
+                <a:solidFill>
+                  <a:srgbClr val="C00000"/>
+                </a:solidFill>
+              </a:rPr>
+              <a:t>hours</a:t>
+            </a:r>
+            <a:r>
+              <a:rPr lang="en-US" sz="2200" b="1" dirty="0"/>
+              <a:t> </a:t>
+            </a:r>
+            <a:r>
+              <a:rPr lang="en-US" sz="2200" b="1" dirty="0">
+                <a:solidFill>
+                  <a:srgbClr val="C00000"/>
+                </a:solidFill>
+              </a:rPr>
+              <a:t>of</a:t>
+            </a:r>
+            <a:r>
+              <a:rPr lang="en-US" sz="2200" b="1" dirty="0"/>
+              <a:t> </a:t>
+            </a:r>
+            <a:r>
+              <a:rPr lang="en-US" sz="2200" b="1" dirty="0">
+                <a:solidFill>
+                  <a:srgbClr val="C00000"/>
+                </a:solidFill>
+              </a:rPr>
+              <a:t>study</a:t>
+            </a:r>
+            <a:r>
+              <a:rPr lang="en-US" sz="2200" dirty="0"/>
+              <a:t>, </a:t>
+            </a:r>
+            <a:r>
+              <a:rPr lang="en-US" sz="2200" b="1" dirty="0">
+                <a:solidFill>
+                  <a:srgbClr val="C00000"/>
+                </a:solidFill>
+              </a:rPr>
+              <a:t>attendance</a:t>
+            </a:r>
+            <a:r>
+              <a:rPr lang="en-US" sz="2200" dirty="0"/>
+              <a:t>, and </a:t>
+            </a:r>
+            <a:r>
+              <a:rPr lang="en-US" sz="2200" b="1" dirty="0">
+                <a:solidFill>
+                  <a:srgbClr val="C00000"/>
+                </a:solidFill>
+              </a:rPr>
+              <a:t>previous</a:t>
+            </a:r>
+            <a:r>
+              <a:rPr lang="en-US" sz="2200" b="1" dirty="0"/>
+              <a:t> </a:t>
+            </a:r>
+            <a:r>
+              <a:rPr lang="en-US" sz="2200" b="1" dirty="0">
+                <a:solidFill>
+                  <a:srgbClr val="C00000"/>
+                </a:solidFill>
+              </a:rPr>
+              <a:t>marks</a:t>
+            </a:r>
+            <a:r>
+              <a:rPr lang="en-US" sz="2200" dirty="0"/>
+              <a:t>.</a:t>
+            </a:r>
+          </a:p>
+          <a:p>
+            <a:pPr lvl="1"/>
+            <a:r>
+              <a:rPr lang="en-US" sz="2200" dirty="0"/>
+              <a:t>The model </a:t>
+            </a:r>
+            <a:r>
+              <a:rPr lang="en-US" sz="2200" b="1" dirty="0">
+                <a:solidFill>
+                  <a:srgbClr val="C00000"/>
+                </a:solidFill>
+              </a:rPr>
+              <a:t>generalizes</a:t>
+            </a:r>
+            <a:r>
+              <a:rPr lang="en-US" sz="2200" dirty="0"/>
+              <a:t> </a:t>
+            </a:r>
+            <a:r>
+              <a:rPr lang="en-US" sz="2200" b="1" dirty="0">
+                <a:solidFill>
+                  <a:srgbClr val="C00000"/>
+                </a:solidFill>
+              </a:rPr>
+              <a:t>well</a:t>
+            </a:r>
+            <a:r>
+              <a:rPr lang="en-US" sz="2200" dirty="0"/>
+              <a:t> to new data and performs well on both training and test sets.</a:t>
+            </a:r>
+          </a:p>
+          <a:p>
+            <a:pPr marL="0" indent="0">
+              <a:buNone/>
+            </a:pPr>
+            <a:endParaRPr lang="en-IN" sz="2400" dirty="0"/>
+          </a:p>
+        </p:txBody>
+      </p:sp>
+    </p:spTree>
+    <p:extLst>
+      <p:ext uri="{BB962C8B-B14F-4D97-AF65-F5344CB8AC3E}">
+        <p14:creationId xmlns:p14="http://schemas.microsoft.com/office/powerpoint/2010/main" val="1976489112"/>
+      </p:ext>
+    </p:extLst>
+  </p:cSld>
+  <p:clrMapOvr>
+    <a:masterClrMapping/>
+  </p:clrMapOvr>
+</p:sld>
+</file>
+
+<file path=ppt/slides/slide151.xml><?xml version="1.0" encoding="utf-8"?>
+<p:sld xmlns:a="http://schemas.openxmlformats.org/drawingml/2006/main" xmlns:r="http://schemas.openxmlformats.org/officeDocument/2006/relationships" xmlns:p="http://schemas.openxmlformats.org/presentationml/2006/main">
+  <p:cSld>
+    <p:spTree>
+      <p:nvGrpSpPr>
+        <p:cNvPr id="1" name="">
+          <a:extLst>
+            <a:ext uri="{FF2B5EF4-FFF2-40B4-BE49-F238E27FC236}">
               <a16:creationId xmlns:a16="http://schemas.microsoft.com/office/drawing/2014/main" id="{155B72B8-0660-A751-EFEF-BE522AE82708}"/>
             </a:ext>
           </a:extLst>
@@ -22130,7 +22331,7 @@
 </p:sld>
 </file>
 
-<file path=ppt/slides/slide151.xml><?xml version="1.0" encoding="utf-8"?>
+<file path=ppt/slides/slide152.xml><?xml version="1.0" encoding="utf-8"?>
 <p:sld xmlns:a="http://schemas.openxmlformats.org/drawingml/2006/main" xmlns:r="http://schemas.openxmlformats.org/officeDocument/2006/relationships" xmlns:p="http://schemas.openxmlformats.org/presentationml/2006/main">
   <p:cSld>
     <p:spTree>
